--- a/docs/talks/decks/04-deep-dive.pptx
+++ b/docs/talks/decks/04-deep-dive.pptx
@@ -697,7 +697,7 @@
           <a:p>
             <a:r>
               <a:rPr lang="en-US" dirty="0"/>
-              <a:t>Hooks do not mutate; they return effects from a closed union, applied by clamping appliers. Walk A, B, D as walls and C as a sign — get the laugh. Then the stance: every "just this once" escape hatch is a second rules implementation wearing a trench coat.</a:t>
+              <a:t>Hooks come in two shapes: reducers (react to events, return requested effects) and one damage transformer. Neither mutates — the engine applies every effect itself, clamped. The letters are the guardrails' fixed names; walk them by priority (that is why D comes before C). A, B, D are walls; C — Balance, limits on how strong content effects may be — is a sign; get the laugh. Then the stance: every "just this once" escape hatch is a second rules implementation wearing a trench coat.</a:t>
             </a:r>
             <a:endParaRPr lang="en-US" dirty="0"/>
           </a:p>
@@ -1225,7 +1225,7 @@
           <a:p>
             <a:r>
               <a:rPr lang="en-US" dirty="0"/>
-              <a:t>The headline receipt and the emotional peak. Land the point and pause.</a:t>
+              <a:t>The headline receipt and the emotional peak. The dice are the poetic part: roll a real d20 and the value reaches the engine as a recorded SupplyDice command through the same seam all randomness flows through — a physical die becomes engine randomness without breaking replay. Skip the roll and the house rolls for you. Land the point and pause.</a:t>
             </a:r>
             <a:endParaRPr lang="en-US" dirty="0"/>
           </a:p>
@@ -1489,7 +1489,7 @@
           <a:p>
             <a:r>
               <a:rPr lang="en-US" dirty="0"/>
-              <a:t>Open with the disease everyone has had. Any interactive system on multiple surfaces grows multiple implementations of its own domain logic. In games it is vivid: server-authoritative rules, client approximations with rollback and mis-prediction, stale scripted tutorials, divergent ports.</a:t>
+              <a:t>Open with the disease everyone has had. Any interactive system on multiple surfaces grows multiple implementations of its own domain logic. In games it is vivid: the server owns the real rules; the client predicts each outcome so play feels instant and must undo and re-simulate when the server disagrees ('prediction' and 'rollback' — both bug factories); tutorials go stale; ports diverge.</a:t>
             </a:r>
             <a:endParaRPr lang="en-US" dirty="0"/>
           </a:p>
@@ -1577,7 +1577,7 @@
           <a:p>
             <a:r>
               <a:rPr lang="en-US" dirty="0"/>
-              <a:t>Final beat. Q&amp;A prep lives in the talk doc: latency (turn-based spends latency tolerance to buy zero reconciliation), cheating (authority resolves everything; info leakage is the remaining surface), DSL deliberately not Turing-complete, goldens move deliberately, why Rust (wasm+native+no_std, closed enums, branded types), and what is not unified (chat/AV reserved, desktop single-player, Balance advisory).</a:t>
+              <a:t>Final beat. Q&amp;A prep lives in the talk doc: latency (turn-based spends latency tolerance to buy zero reconciliation), cheating (authority resolves everything; info leakage is the remaining surface), DSL deliberately not Turing-complete, goldens move deliberately, why Rust (wasm+native+no_std, closed enums, branded types), and what is not unified (the network protocol reserves message types for chat and audio/video but the server does not implement them yet; desktop is single-player-only; Balance is advisory).</a:t>
             </a:r>
             <a:endParaRPr lang="en-US" dirty="0"/>
           </a:p>
@@ -1753,7 +1753,7 @@
           <a:p>
             <a:r>
               <a:rPr lang="en-US" dirty="0"/>
-              <a:t>Determinism here is load-bearing. Three rules, enforced, not aspirational.</a:t>
+              <a:t>Determinism here is load-bearing. Three rules, enforced, not aspirational. The dice wrinkle proves the rule: a table-supplied die is a recorded command — a literal value on the log — so real dice never break replay.</a:t>
             </a:r>
             <a:endParaRPr lang="en-US" dirty="0"/>
           </a:p>
@@ -2017,7 +2017,7 @@
           <a:p>
             <a:r>
               <a:rPr lang="en-US" dirty="0"/>
-              <a:t>Make the engine concrete. Health mitigated by Sanity, Sanity by Energy, Energy by Health. The formula fits on a slide. Mechanics interlock — which is exactly why they must not be re-implemented per surface.</a:t>
+              <a:t>Make the engine concrete. Every attack first rolls a d20 to-hit — natural 20 crits for 1.5x, natural 1 stumbles into self-damage, 2-5 miss — then damage that lands runs the formula. Health guarded by Sanity, Sanity by Energy, Energy by Health. Mechanics interlock — which is exactly why they must not be re-implemented per surface.</a:t>
             </a:r>
             <a:endParaRPr lang="en-US" dirty="0"/>
           </a:p>
@@ -3518,7 +3518,7 @@
                 <a:ea typeface="Cambria" pitchFamily="34" charset="-122"/>
                 <a:cs typeface="Cambria" pitchFamily="34" charset="-120"/>
               </a:rPr>
-              <a:t>The scripts are a data-AST, not a language runtime</a:t>
+              <a:t>The scripts are data, not a language runtime</a:t>
             </a:r>
             <a:endParaRPr lang="en-US" sz="3000" dirty="0"/>
           </a:p>
@@ -3897,7 +3897,7 @@
                 <a:ea typeface="Calibri" pitchFamily="34" charset="-122"/>
                 <a:cs typeface="Calibri" pitchFamily="34" charset="-120"/>
               </a:rPr>
-              <a:t>Pratt-parsed from TOML — </a:t>
+              <a:t>Parsed from TOML — </a:t>
             </a:r>
             <a:pPr indent="0" marL="0">
               <a:buNone/>
@@ -4771,7 +4771,7 @@
                 <a:ea typeface="Calibri" pitchFamily="34" charset="-122"/>
                 <a:cs typeface="Calibri" pitchFamily="34" charset="-120"/>
               </a:rPr>
-              <a:t>closed union + clamped application through unforgeable seams; no raw setters reachable, ever</a:t>
+              <a:t>a fixed effect menu; the engine applies each one itself, clamped — no raw setters reachable, ever</a:t>
             </a:r>
             <a:endParaRPr lang="en-US" sz="1150" dirty="0"/>
           </a:p>
@@ -8332,7 +8332,7 @@
                 <a:ea typeface="Calibri" pitchFamily="34" charset="-122"/>
                 <a:cs typeface="Calibri" pitchFamily="34" charset="-120"/>
               </a:rPr>
-              <a:t>Browser — Dioxus → wasm, core linked as a rlib. Every line is presentation: the CRT parser UI, point-and-click affordances, a procedural audio engine riding the cue stream.</a:t>
+              <a:t>Browser — Dioxus → wasm, core linked as an ordinary library. Every line is presentation: a type-your-commands terminal UI, point-and-click affordances, a procedural audio engine riding the cue stream.</a:t>
             </a:r>
             <a:endParaRPr lang="en-US" sz="1150" dirty="0"/>
           </a:p>
@@ -8486,7 +8486,7 @@
                 <a:ea typeface="Calibri" pitchFamily="34" charset="-122"/>
                 <a:cs typeface="Calibri" pitchFamily="34" charset="-120"/>
               </a:rPr>
-              <a:t>Desktop — the same client crate in a dioxus-desktop webview, workspace-excluded so GTK/WebKit never touches the gates. Ships .deb / .dmg / .msi via dx bundle.</a:t>
+              <a:t>Desktop — the same client code in a webview shell, kept out of the main build so its OS-level GUI libraries never touch the gates. Ships .deb / .dmg / .msi via dx bundle.</a:t>
             </a:r>
             <a:endParaRPr lang="en-US" sz="1150" dirty="0"/>
           </a:p>
@@ -8640,7 +8640,7 @@
                 <a:ea typeface="Calibri" pitchFamily="34" charset="-122"/>
                 <a:cs typeface="Calibri" pitchFamily="34" charset="-120"/>
               </a:rPr>
-              <a:t>JS embedding — a stateful Authority handle; nothing but JSON strings crosses the seam. Intent in; cues, view model, snapshot out. Undo is host-side snapshot/restore.</a:t>
+              <a:t>JS embedding — a stateful Authority handle; nothing but JSON strings crosses the boundary. A command in; cues, view model, snapshot out. Undo is host-side snapshot/restore.</a:t>
             </a:r>
             <a:endParaRPr lang="en-US" sz="1150" dirty="0"/>
           </a:p>
@@ -8794,7 +8794,7 @@
                 <a:ea typeface="Calibri" pitchFamily="34" charset="-122"/>
                 <a:cs typeface="Calibri" pitchFamily="34" charset="-120"/>
               </a:rPr>
-              <a:t>Physical board — the tabletop bridge plus the host controller. ViewModel → e-ink paint + pieces; NFC events → actor-tagged commands; COBS-framed serial.</a:t>
+              <a:t>Physical board — the tabletop bridge plus the host controller. ViewModel → e-ink paint + pieces; NFC events → character-tagged commands; framed serial protocol.</a:t>
             </a:r>
             <a:endParaRPr lang="en-US" sz="1150" dirty="0"/>
           </a:p>
@@ -9525,7 +9525,7 @@
                 <a:ea typeface="Calibri" pitchFamily="34" charset="-122"/>
                 <a:cs typeface="Calibri" pitchFamily="34" charset="-120"/>
               </a:rPr>
-              <a:t>← DeviceEvents flow back the other way: an NFC piece set on a tile resolves into an actor-tagged engine Command</a:t>
+              <a:t>← DeviceEvents flow back: an NFC piece set down — or real dice, entering as recorded roll commands — resolve into character-tagged engine Commands</a:t>
             </a:r>
             <a:endParaRPr lang="en-US" sz="1250" dirty="0"/>
           </a:p>
@@ -10304,7 +10304,7 @@
                 <a:ea typeface="Calibri" pitchFamily="34" charset="-122"/>
                 <a:cs typeface="Calibri" pitchFamily="34" charset="-120"/>
               </a:rPr>
-              <a:t>every committed recording stepped intent-by-intent, diffing result + snapshot + view per step</a:t>
+              <a:t>every committed recording stepped command-by-command, diffing result + snapshot + view per step</a:t>
             </a:r>
             <a:endParaRPr lang="en-US" sz="1100" dirty="0"/>
           </a:p>
@@ -11482,7 +11482,7 @@
                 <a:ea typeface="Calibri" pitchFamily="34" charset="-122"/>
                 <a:cs typeface="Calibri" pitchFamily="34" charset="-120"/>
               </a:rPr>
-              <a:t>ASCII room names forever — a dead engine's collation order, pinned.</a:t>
+              <a:t>ASCII room names forever — the old TypeScript engine's sort order is baked into the fixtures.</a:t>
             </a:r>
             <a:endParaRPr lang="en-US" sz="1200" dirty="0"/>
           </a:p>
@@ -14373,7 +14373,7 @@
                 <a:ea typeface="Calibri" pitchFamily="34" charset="-122"/>
                 <a:cs typeface="Calibri" pitchFamily="34" charset="-120"/>
               </a:rPr>
-              <a:t>All randomness flows through World.rng — a seeded mulberry32. Every d100 shake-off roll, every encounter roll, every spanning-tree map draws from it. The RNG state rides inside the snapshot, so determinism survives save/load.</a:t>
+              <a:t>All randomness flows through World.rng — a seeded mulberry32. Every to-hit d20, every shake-off d100, every encounter roll draws from it; its state rides in the snapshot. Even a real die rolled at the table enters as a recorded command — replays stay exact.</a:t>
             </a:r>
             <a:endParaRPr lang="en-US" sz="1250" dirty="0"/>
           </a:p>
@@ -15827,7 +15827,7 @@
                 <a:ea typeface="Calibri" pitchFamily="34" charset="-122"/>
                 <a:cs typeface="Calibri" pitchFamily="34" charset="-120"/>
               </a:rPr>
-              <a:t>Determinism across a rewrite means inheriting your past self's collation quirks. Write them down.</a:t>
+              <a:t>Determinism across a rewrite means inheriting your past self's sorting quirks. Write them down.</a:t>
             </a:r>
             <a:endParaRPr lang="en-US" sz="1200" dirty="0"/>
           </a:p>
@@ -16347,8 +16347,8 @@
         </p:nvSpPr>
         <p:spPr>
           <a:xfrm>
-            <a:off x="6126480" y="1828800"/>
-            <a:ext cx="5303520" cy="1645920"/>
+            <a:off x="6126480" y="1755648"/>
+            <a:ext cx="5303520" cy="1828800"/>
           </a:xfrm>
           <a:prstGeom prst="rect">
             <a:avLst/>
@@ -16359,6 +16359,23 @@
         <p:txBody>
           <a:bodyPr wrap="square" lIns="0" tIns="0" rIns="0" bIns="0" rtlCol="0" anchor="t"/>
           <a:lstStyle/>
+          <a:p>
+            <a:pPr indent="0" marL="0">
+              <a:buNone/>
+            </a:pPr>
+            <a:r>
+              <a:rPr lang="en-US" sz="1250" dirty="0">
+                <a:solidFill>
+                  <a:srgbClr val="C9A227"/>
+                </a:solidFill>
+                <a:latin typeface="Courier New" pitchFamily="34" charset="0"/>
+                <a:ea typeface="Courier New" pitchFamily="34" charset="-122"/>
+                <a:cs typeface="Courier New" pitchFamily="34" charset="-120"/>
+              </a:rPr>
+              <a:t>to-hit    = d20  (20 crit ×1.5 · 1 stumble</a:t>
+            </a:r>
+            <a:endParaRPr lang="en-US" sz="1250" dirty="0"/>
+          </a:p>
           <a:p>
             <a:pPr indent="0" marL="0">
               <a:spcAft>
@@ -16367,7 +16384,7 @@
               <a:buNone/>
             </a:pPr>
             <a:r>
-              <a:rPr lang="en-US" sz="1400" dirty="0">
+              <a:rPr lang="en-US" sz="1250" dirty="0">
                 <a:solidFill>
                   <a:srgbClr val="C9A227"/>
                 </a:solidFill>
@@ -16375,16 +16392,19 @@
                 <a:ea typeface="Courier New" pitchFamily="34" charset="-122"/>
                 <a:cs typeface="Courier New" pitchFamily="34" charset="-120"/>
               </a:rPr>
-              <a:t>mitigated = max(0, attack − armor)</a:t>
-            </a:r>
-            <a:endParaRPr lang="en-US" sz="1400" dirty="0"/>
+              <a:t>                  · 2–5 miss · 6–19 hit)</a:t>
+            </a:r>
+            <a:endParaRPr lang="en-US" sz="1250" dirty="0"/>
           </a:p>
           <a:p>
             <a:pPr indent="0" marL="0">
-              <a:buNone/>
-            </a:pPr>
-            <a:r>
-              <a:rPr lang="en-US" sz="1400" dirty="0">
+              <a:spcAft>
+                <a:spcPts val="800"/>
+              </a:spcAft>
+              <a:buNone/>
+            </a:pPr>
+            <a:r>
+              <a:rPr lang="en-US" sz="1250" dirty="0">
                 <a:solidFill>
                   <a:srgbClr val="C9A227"/>
                 </a:solidFill>
@@ -16392,16 +16412,16 @@
                 <a:ea typeface="Courier New" pitchFamily="34" charset="-122"/>
                 <a:cs typeface="Courier New" pitchFamily="34" charset="-120"/>
               </a:rPr>
-              <a:t>final     = mitigated</a:t>
-            </a:r>
-            <a:endParaRPr lang="en-US" sz="1400" dirty="0"/>
+              <a:t>mitigated = max(0, attack − armor)</a:t>
+            </a:r>
+            <a:endParaRPr lang="en-US" sz="1250" dirty="0"/>
           </a:p>
           <a:p>
             <a:pPr indent="0" marL="0">
               <a:buNone/>
             </a:pPr>
             <a:r>
-              <a:rPr lang="en-US" sz="1400" dirty="0">
+              <a:rPr lang="en-US" sz="1250" dirty="0">
                 <a:solidFill>
                   <a:srgbClr val="C9A227"/>
                 </a:solidFill>
@@ -16409,16 +16429,16 @@
                 <a:ea typeface="Courier New" pitchFamily="34" charset="-122"/>
                 <a:cs typeface="Courier New" pitchFamily="34" charset="-120"/>
               </a:rPr>
-              <a:t>            × max(0, 10 − mitigator)</a:t>
-            </a:r>
-            <a:endParaRPr lang="en-US" sz="1400" dirty="0"/>
+              <a:t>final     = mitigated</a:t>
+            </a:r>
+            <a:endParaRPr lang="en-US" sz="1250" dirty="0"/>
           </a:p>
           <a:p>
             <a:pPr indent="0" marL="0">
               <a:buNone/>
             </a:pPr>
             <a:r>
-              <a:rPr lang="en-US" sz="1400" dirty="0">
+              <a:rPr lang="en-US" sz="1250" dirty="0">
                 <a:solidFill>
                   <a:srgbClr val="C9A227"/>
                 </a:solidFill>
@@ -16426,9 +16446,26 @@
                 <a:ea typeface="Courier New" pitchFamily="34" charset="-122"/>
                 <a:cs typeface="Courier New" pitchFamily="34" charset="-120"/>
               </a:rPr>
+              <a:t>            × max(0, 10 − mitigator)</a:t>
+            </a:r>
+            <a:endParaRPr lang="en-US" sz="1250" dirty="0"/>
+          </a:p>
+          <a:p>
+            <a:pPr indent="0" marL="0">
+              <a:buNone/>
+            </a:pPr>
+            <a:r>
+              <a:rPr lang="en-US" sz="1250" dirty="0">
+                <a:solidFill>
+                  <a:srgbClr val="C9A227"/>
+                </a:solidFill>
+                <a:latin typeface="Courier New" pitchFamily="34" charset="0"/>
+                <a:ea typeface="Courier New" pitchFamily="34" charset="-122"/>
+                <a:cs typeface="Courier New" pitchFamily="34" charset="-120"/>
+              </a:rPr>
               <a:t>            × 0.2 × lightMultiplier</a:t>
             </a:r>
-            <a:endParaRPr lang="en-US" sz="1400" dirty="0"/>
+            <a:endParaRPr lang="en-US" sz="1250" dirty="0"/>
           </a:p>
         </p:txBody>
       </p:sp>
@@ -16512,7 +16549,7 @@
                 <a:ea typeface="Calibri" pitchFamily="34" charset="-122"/>
                 <a:cs typeface="Calibri" pitchFamily="34" charset="-120"/>
               </a:rPr>
-              <a:t>Afflictions latch off thresholds — KO, Panic, Fear, Confused — and gate which actions you may attempt, with escalating per-turn shake-off rolls.</a:t>
+              <a:t>lightMultiplier: light-averse monsters take 1.5x damage in a lit room. Afflictions — KO, Panic, Fear, Confused — trigger at thresholds and stick, gating which actions you may attempt.</a:t>
             </a:r>
             <a:endParaRPr lang="en-US" sz="1300" dirty="0"/>
           </a:p>
@@ -17469,7 +17506,7 @@
                 <a:ea typeface="Calibri" pitchFamily="34" charset="-122"/>
                 <a:cs typeface="Calibri" pitchFamily="34" charset="-120"/>
               </a:rPr>
-              <a:t>key → &amp;'static dyn</a:t>
+              <a:t>a lookup table:</a:t>
             </a:r>
             <a:endParaRPr lang="en-US" sz="1000" dirty="0"/>
           </a:p>
@@ -17486,7 +17523,7 @@
                 <a:ea typeface="Calibri" pitchFamily="34" charset="-122"/>
                 <a:cs typeface="Calibri" pitchFamily="34" charset="-120"/>
               </a:rPr>
-              <a:t>compiled-in, stateless</a:t>
+              <a:t>name → compiled-in code</a:t>
             </a:r>
             <a:endParaRPr lang="en-US" sz="1000" dirty="0"/>
           </a:p>
@@ -17654,7 +17691,7 @@
                 <a:ea typeface="Calibri" pitchFamily="34" charset="-122"/>
                 <a:cs typeface="Calibri" pitchFamily="34" charset="-120"/>
               </a:rPr>
-              <a:t>the TOML-authored,</a:t>
+              <a:t>the TOML-authored script,</a:t>
             </a:r>
             <a:endParaRPr lang="en-US" sz="1000" dirty="0"/>
           </a:p>
@@ -17671,7 +17708,7 @@
                 <a:ea typeface="Calibri" pitchFamily="34" charset="-122"/>
                 <a:cs typeface="Calibri" pitchFamily="34" charset="-120"/>
               </a:rPr>
-              <a:t>loop-free data-AST</a:t>
+              <a:t>stored as data — no loops</a:t>
             </a:r>
             <a:endParaRPr lang="en-US" sz="1000" dirty="0"/>
           </a:p>
